--- a/Ch11_Reformation.pptx
+++ b/Ch11_Reformation.pptx
@@ -2658,7 +2658,7 @@
                 <a:ea typeface="Calibri" pitchFamily="34" charset="-122"/>
                 <a:cs typeface="Calibri" pitchFamily="34" charset="-120"/>
               </a:rPr>
-              <a:t>• 1562–3 創作 · 1567 收入第二部 Mass 集</a:t>
+              <a:t>• 1562–3 創作 · 1567 出版</a:t>
             </a:r>
             <a:endParaRPr lang="en-US" sz="1400" dirty="0"/>
           </a:p>
@@ -2698,7 +2698,7 @@
                 <a:ea typeface="Calibri" pitchFamily="34" charset="-122"/>
                 <a:cs typeface="Calibri" pitchFamily="34" charset="-120"/>
               </a:rPr>
-              <a:t>• 6 聲部 SATTBB</a:t>
+              <a:t>• 6 聲部 SATTBB · paraphrase 技法</a:t>
             </a:r>
             <a:endParaRPr lang="en-US" sz="1400" dirty="0"/>
           </a:p>
@@ -2718,8 +2718,17 @@
                 <a:ea typeface="Calibri" pitchFamily="34" charset="-122"/>
                 <a:cs typeface="Calibri" pitchFamily="34" charset="-120"/>
               </a:rPr>
-              <a:t>• paraphrase 技法（非固定 cantus firmus）</a:t>
-            </a:r>
+              <a:t>• 無世俗旋律——符合 Trent 精神</a:t>
+            </a:r>
+            <a:endParaRPr lang="en-US" sz="1400" dirty="0"/>
+          </a:p>
+          <a:p>
+            <a:pPr indent="0" marL="0">
+              <a:spcAft>
+                <a:spcPts val="100"/>
+              </a:spcAft>
+              <a:buNone/>
+            </a:pPr>
             <a:endParaRPr lang="en-US" sz="1400" dirty="0"/>
           </a:p>
           <a:p>
@@ -2738,17 +2747,8 @@
                 <a:ea typeface="Calibri" pitchFamily="34" charset="-122"/>
                 <a:cs typeface="Calibri" pitchFamily="34" charset="-120"/>
               </a:rPr>
-              <a:t>• 無世俗旋律——符合 Trent 精神</a:t>
-            </a:r>
-            <a:endParaRPr lang="en-US" sz="1400" dirty="0"/>
-          </a:p>
-          <a:p>
-            <a:pPr indent="0" marL="0">
-              <a:spcAft>
-                <a:spcPts val="100"/>
-              </a:spcAft>
-              <a:buNone/>
-            </a:pPr>
+              <a:t>■ Credo 特徵</a:t>
+            </a:r>
             <a:endParaRPr lang="en-US" sz="1400" dirty="0"/>
           </a:p>
           <a:p>
@@ -2767,7 +2767,7 @@
                 <a:ea typeface="Calibri" pitchFamily="34" charset="-122"/>
                 <a:cs typeface="Calibri" pitchFamily="34" charset="-120"/>
               </a:rPr>
-              <a:t>■ Credo 特徵</a:t>
+              <a:t>• 長文字需清晰 · homorhythm 為主</a:t>
             </a:r>
             <a:endParaRPr lang="en-US" sz="1400" dirty="0"/>
           </a:p>
@@ -2787,7 +2787,7 @@
                 <a:ea typeface="Calibri" pitchFamily="34" charset="-122"/>
                 <a:cs typeface="Calibri" pitchFamily="34" charset="-120"/>
               </a:rPr>
-              <a:t>• 長文字需清晰</a:t>
+              <a:t>• 聲部幾乎同時換字</a:t>
             </a:r>
             <a:endParaRPr lang="en-US" sz="1400" dirty="0"/>
           </a:p>
@@ -2807,7 +2807,7 @@
                 <a:ea typeface="Calibri" pitchFamily="34" charset="-122"/>
                 <a:cs typeface="Calibri" pitchFamily="34" charset="-120"/>
               </a:rPr>
-              <a:t>• 大部分同節奏 (homorhythm)</a:t>
+              <a:t>• et incarnatus / crucifixus 靜思感</a:t>
             </a:r>
             <a:endParaRPr lang="en-US" sz="1400" dirty="0"/>
           </a:p>
@@ -2827,8 +2827,17 @@
                 <a:ea typeface="Calibri" pitchFamily="34" charset="-122"/>
                 <a:cs typeface="Calibri" pitchFamily="34" charset="-120"/>
               </a:rPr>
-              <a:t>• 聲部幾乎同時換字</a:t>
-            </a:r>
+              <a:t>• 模仿段落較少——優先清晰度</a:t>
+            </a:r>
+            <a:endParaRPr lang="en-US" sz="1400" dirty="0"/>
+          </a:p>
+          <a:p>
+            <a:pPr indent="0" marL="0">
+              <a:spcAft>
+                <a:spcPts val="100"/>
+              </a:spcAft>
+              <a:buNone/>
+            </a:pPr>
             <a:endParaRPr lang="en-US" sz="1400" dirty="0"/>
           </a:p>
           <a:p>
@@ -2847,7 +2856,7 @@
                 <a:ea typeface="Calibri" pitchFamily="34" charset="-122"/>
                 <a:cs typeface="Calibri" pitchFamily="34" charset="-120"/>
               </a:rPr>
-              <a:t>• et incarnatus / crucifixus 靜思感</a:t>
+              <a:t>■ 織度</a:t>
             </a:r>
             <a:endParaRPr lang="en-US" sz="1400" dirty="0"/>
           </a:p>
@@ -2867,76 +2876,7 @@
                 <a:ea typeface="Calibri" pitchFamily="34" charset="-122"/>
                 <a:cs typeface="Calibri" pitchFamily="34" charset="-120"/>
               </a:rPr>
-              <a:t>• 模仿段落較少——優先清晰度</a:t>
-            </a:r>
-            <a:endParaRPr lang="en-US" sz="1400" dirty="0"/>
-          </a:p>
-          <a:p>
-            <a:pPr indent="0" marL="0">
-              <a:spcAft>
-                <a:spcPts val="100"/>
-              </a:spcAft>
-              <a:buNone/>
-            </a:pPr>
-            <a:endParaRPr lang="en-US" sz="1400" dirty="0"/>
-          </a:p>
-          <a:p>
-            <a:pPr indent="0" marL="0">
-              <a:spcAft>
-                <a:spcPts val="100"/>
-              </a:spcAft>
-              <a:buNone/>
-            </a:pPr>
-            <a:r>
-              <a:rPr lang="en-US" sz="1400" dirty="0">
-                <a:solidFill>
-                  <a:srgbClr val="1A2240"/>
-                </a:solidFill>
-                <a:latin typeface="Calibri" pitchFamily="34" charset="0"/>
-                <a:ea typeface="Calibri" pitchFamily="34" charset="-122"/>
-                <a:cs typeface="Calibri" pitchFamily="34" charset="-120"/>
-              </a:rPr>
-              <a:t>■ 織度</a:t>
-            </a:r>
-            <a:endParaRPr lang="en-US" sz="1400" dirty="0"/>
-          </a:p>
-          <a:p>
-            <a:pPr indent="0" marL="0">
-              <a:spcAft>
-                <a:spcPts val="100"/>
-              </a:spcAft>
-              <a:buNone/>
-            </a:pPr>
-            <a:r>
-              <a:rPr lang="en-US" sz="1400" dirty="0">
-                <a:solidFill>
-                  <a:srgbClr val="1A2240"/>
-                </a:solidFill>
-                <a:latin typeface="Calibri" pitchFamily="34" charset="0"/>
-                <a:ea typeface="Calibri" pitchFamily="34" charset="-122"/>
-                <a:cs typeface="Calibri" pitchFamily="34" charset="-120"/>
-              </a:rPr>
-              <a:t>• 每段獨立分節</a:t>
-            </a:r>
-            <a:endParaRPr lang="en-US" sz="1400" dirty="0"/>
-          </a:p>
-          <a:p>
-            <a:pPr indent="0" marL="0">
-              <a:spcAft>
-                <a:spcPts val="100"/>
-              </a:spcAft>
-              <a:buNone/>
-            </a:pPr>
-            <a:r>
-              <a:rPr lang="en-US" sz="1400" dirty="0">
-                <a:solidFill>
-                  <a:srgbClr val="1A2240"/>
-                </a:solidFill>
-                <a:latin typeface="Calibri" pitchFamily="34" charset="0"/>
-                <a:ea typeface="Calibri" pitchFamily="34" charset="-122"/>
-                <a:cs typeface="Calibri" pitchFamily="34" charset="-120"/>
-              </a:rPr>
-              <a:t>• SA · TB · 全體 · 六聲部輪流</a:t>
+              <a:t>• 每段獨立分節 · SA / TB / 全體輪流</a:t>
             </a:r>
             <a:endParaRPr lang="en-US" sz="1400" dirty="0"/>
           </a:p>
@@ -3974,27 +3914,7 @@
                 <a:ea typeface="Calibri" pitchFamily="34" charset="-122"/>
                 <a:cs typeface="Calibri" pitchFamily="34" charset="-120"/>
               </a:rPr>
-              <a:t>• 聖詠本、譜冊普及各聖堂</a:t>
-            </a:r>
-            <a:endParaRPr lang="en-US" sz="1400" dirty="0"/>
-          </a:p>
-          <a:p>
-            <a:pPr indent="0" marL="0">
-              <a:spcAft>
-                <a:spcPts val="100"/>
-              </a:spcAft>
-              <a:buNone/>
-            </a:pPr>
-            <a:r>
-              <a:rPr lang="en-US" sz="1400" dirty="0">
-                <a:solidFill>
-                  <a:srgbClr val="E8D8A8"/>
-                </a:solidFill>
-                <a:latin typeface="Calibri" pitchFamily="34" charset="0"/>
-                <a:ea typeface="Calibri" pitchFamily="34" charset="-122"/>
-                <a:cs typeface="Calibri" pitchFamily="34" charset="-120"/>
-              </a:rPr>
-              <a:t>• 原住民與西班牙樂長並肩工作</a:t>
+              <a:t>• 聖詠本普及 · 原住民與西班牙並肩</a:t>
             </a:r>
             <a:endParaRPr lang="en-US" sz="1400" dirty="0"/>
           </a:p>
@@ -4043,7 +3963,7 @@
                 <a:ea typeface="Calibri" pitchFamily="34" charset="-122"/>
                 <a:cs typeface="Calibri" pitchFamily="34" charset="-120"/>
               </a:rPr>
-              <a:t>• 西班牙 Galicia 出生 · 1554 抵墨西哥</a:t>
+              <a:t>• Galicia 出生 · 1554 抵墨西哥</a:t>
             </a:r>
             <a:endParaRPr lang="en-US" sz="1400" dirty="0"/>
           </a:p>
@@ -4112,7 +4032,7 @@
                 <a:ea typeface="Calibri" pitchFamily="34" charset="-122"/>
                 <a:cs typeface="Calibri" pitchFamily="34" charset="-120"/>
               </a:rPr>
-              <a:t>• 織度近似 Palestrina——未「美洲化」</a:t>
+              <a:t>• 織度近似 Palestrina</a:t>
             </a:r>
             <a:endParaRPr lang="en-US" sz="1400" dirty="0"/>
           </a:p>
@@ -4532,8 +4452,17 @@
                 <a:ea typeface="Calibri" pitchFamily="34" charset="-122"/>
                 <a:cs typeface="Calibri" pitchFamily="34" charset="-120"/>
               </a:rPr>
-              <a:t>• 高聲部代表童聲 · 低聲部代表成人</a:t>
-            </a:r>
+              <a:t>• 高聲部童聲 · 低聲部成人</a:t>
+            </a:r>
+            <a:endParaRPr lang="en-US" sz="1400" dirty="0"/>
+          </a:p>
+          <a:p>
+            <a:pPr indent="0" marL="0">
+              <a:spcAft>
+                <a:spcPts val="100"/>
+              </a:spcAft>
+              <a:buNone/>
+            </a:pPr>
             <a:endParaRPr lang="en-US" sz="1400" dirty="0"/>
           </a:p>
           <a:p>
@@ -4552,17 +4481,8 @@
                 <a:ea typeface="Calibri" pitchFamily="34" charset="-122"/>
                 <a:cs typeface="Calibri" pitchFamily="34" charset="-120"/>
               </a:rPr>
-              <a:t>• Lassus 文字敏感度的巔峰</a:t>
-            </a:r>
-            <a:endParaRPr lang="en-US" sz="1400" dirty="0"/>
-          </a:p>
-          <a:p>
-            <a:pPr indent="0" marL="0">
-              <a:spcAft>
-                <a:spcPts val="100"/>
-              </a:spcAft>
-              <a:buNone/>
-            </a:pPr>
+              <a:t>■ 影響</a:t>
+            </a:r>
             <a:endParaRPr lang="en-US" sz="1400" dirty="0"/>
           </a:p>
           <a:p>
@@ -4581,47 +4501,7 @@
                 <a:ea typeface="Calibri" pitchFamily="34" charset="-122"/>
                 <a:cs typeface="Calibri" pitchFamily="34" charset="-120"/>
               </a:rPr>
-              <a:t>■ 影響</a:t>
-            </a:r>
-            <a:endParaRPr lang="en-US" sz="1400" dirty="0"/>
-          </a:p>
-          <a:p>
-            <a:pPr indent="0" marL="0">
-              <a:spcAft>
-                <a:spcPts val="100"/>
-              </a:spcAft>
-              <a:buNone/>
-            </a:pPr>
-            <a:r>
-              <a:rPr lang="en-US" sz="1400" dirty="0">
-                <a:solidFill>
-                  <a:srgbClr val="1A2240"/>
-                </a:solidFill>
-                <a:latin typeface="Calibri" pitchFamily="34" charset="0"/>
-                <a:ea typeface="Calibri" pitchFamily="34" charset="-122"/>
-                <a:cs typeface="Calibri" pitchFamily="34" charset="-120"/>
-              </a:rPr>
               <a:t>• Jesuit 教育體系推廣全歐</a:t>
-            </a:r>
-            <a:endParaRPr lang="en-US" sz="1400" dirty="0"/>
-          </a:p>
-          <a:p>
-            <a:pPr indent="0" marL="0">
-              <a:spcAft>
-                <a:spcPts val="100"/>
-              </a:spcAft>
-              <a:buNone/>
-            </a:pPr>
-            <a:r>
-              <a:rPr lang="en-US" sz="1400" dirty="0">
-                <a:solidFill>
-                  <a:srgbClr val="1A2240"/>
-                </a:solidFill>
-                <a:latin typeface="Calibri" pitchFamily="34" charset="0"/>
-                <a:ea typeface="Calibri" pitchFamily="34" charset="-122"/>
-                <a:cs typeface="Calibri" pitchFamily="34" charset="-120"/>
-              </a:rPr>
-              <a:t>• 承 Palestrina 清晰原則 + 表達力</a:t>
             </a:r>
             <a:endParaRPr lang="en-US" sz="1400" dirty="0"/>
           </a:p>
@@ -5739,26 +5619,6 @@
               </a:spcAft>
               <a:buNone/>
             </a:pPr>
-            <a:r>
-              <a:rPr lang="en-US" sz="1400" dirty="0">
-                <a:solidFill>
-                  <a:srgbClr val="E8D8A8"/>
-                </a:solidFill>
-                <a:latin typeface="Calibri" pitchFamily="34" charset="0"/>
-                <a:ea typeface="Calibri" pitchFamily="34" charset="-122"/>
-                <a:cs typeface="Calibri" pitchFamily="34" charset="-120"/>
-              </a:rPr>
-              <a:t>• 音樂風格帶神學意涵</a:t>
-            </a:r>
-            <a:endParaRPr lang="en-US" sz="1400" dirty="0"/>
-          </a:p>
-          <a:p>
-            <a:pPr indent="0" marL="0">
-              <a:spcAft>
-                <a:spcPts val="100"/>
-              </a:spcAft>
-              <a:buNone/>
-            </a:pPr>
             <a:endParaRPr lang="en-US" sz="1400" dirty="0"/>
           </a:p>
           <a:p>
@@ -5817,7 +5677,7 @@
                 <a:ea typeface="Calibri" pitchFamily="34" charset="-122"/>
                 <a:cs typeface="Calibri" pitchFamily="34" charset="-120"/>
               </a:rPr>
-              <a:t>• 傳教士帶拉丁禮儀至中、日、菲</a:t>
+              <a:t>• 傳教士將拉丁禮儀帶到中、日、菲</a:t>
             </a:r>
             <a:endParaRPr lang="en-US" sz="1400" dirty="0"/>
           </a:p>
@@ -12479,7 +12339,7 @@
                 <a:ea typeface="Calibri" pitchFamily="34" charset="-122"/>
                 <a:cs typeface="Calibri" pitchFamily="34" charset="-120"/>
               </a:rPr>
-              <a:t>• 詞：Marot · de Bèze</a:t>
+              <a:t>• 詞：Marot · de Bèze · 曲：Bourgeois</a:t>
             </a:r>
             <a:endParaRPr lang="en-US" sz="1400" dirty="0"/>
           </a:p>
@@ -12499,17 +12359,8 @@
                 <a:ea typeface="Calibri" pitchFamily="34" charset="-122"/>
                 <a:cs typeface="Calibri" pitchFamily="34" charset="-120"/>
               </a:rPr>
-              <a:t>• 曲：Loys Bourgeois (ca. 1510–60)</a:t>
-            </a:r>
-            <a:endParaRPr lang="en-US" sz="1400" dirty="0"/>
-          </a:p>
-          <a:p>
-            <a:pPr indent="0" marL="0">
-              <a:spcAft>
-                <a:spcPts val="100"/>
-              </a:spcAft>
-              <a:buNone/>
-            </a:pPr>
+              <a:t>• 每篇獨立旋律——共 125 首曲調</a:t>
+            </a:r>
             <a:endParaRPr lang="en-US" sz="1400" dirty="0"/>
           </a:p>
           <a:p>
@@ -12528,8 +12379,17 @@
                 <a:ea typeface="Calibri" pitchFamily="34" charset="-122"/>
                 <a:cs typeface="Calibri" pitchFamily="34" charset="-120"/>
               </a:rPr>
-              <a:t>特徵</a:t>
-            </a:r>
+              <a:t>• 自然音階 · 旋律優雅上口</a:t>
+            </a:r>
+            <a:endParaRPr lang="en-US" sz="1400" dirty="0"/>
+          </a:p>
+          <a:p>
+            <a:pPr indent="0" marL="0">
+              <a:spcAft>
+                <a:spcPts val="100"/>
+              </a:spcAft>
+              <a:buNone/>
+            </a:pPr>
             <a:endParaRPr lang="en-US" sz="1400" dirty="0"/>
           </a:p>
           <a:p>
@@ -12548,7 +12408,7 @@
                 <a:ea typeface="Calibri" pitchFamily="34" charset="-122"/>
                 <a:cs typeface="Calibri" pitchFamily="34" charset="-120"/>
               </a:rPr>
-              <a:t>• 每篇獨立旋律——共 125 首曲調</a:t>
+              <a:t>■ Psalm 134 (NAWM 59)</a:t>
             </a:r>
             <a:endParaRPr lang="en-US" sz="1400" dirty="0"/>
           </a:p>
@@ -12568,17 +12428,8 @@
                 <a:ea typeface="Calibri" pitchFamily="34" charset="-122"/>
                 <a:cs typeface="Calibri" pitchFamily="34" charset="-120"/>
               </a:rPr>
-              <a:t>• 自然音階 · 旋律優雅上口</a:t>
-            </a:r>
-            <a:endParaRPr lang="en-US" sz="1400" dirty="0"/>
-          </a:p>
-          <a:p>
-            <a:pPr indent="0" marL="0">
-              <a:spcAft>
-                <a:spcPts val="100"/>
-              </a:spcAft>
-              <a:buNone/>
-            </a:pPr>
+              <a:t>• 後改填為 Doxology</a:t>
+            </a:r>
             <a:endParaRPr lang="en-US" sz="1400" dirty="0"/>
           </a:p>
           <a:p>
@@ -12597,8 +12448,17 @@
                 <a:ea typeface="Calibri" pitchFamily="34" charset="-122"/>
                 <a:cs typeface="Calibri" pitchFamily="34" charset="-120"/>
               </a:rPr>
-              <a:t>■ Psalm 134 (NAWM 59)</a:t>
-            </a:r>
+              <a:t>• 英語「Old 100th」旋律源自此</a:t>
+            </a:r>
+            <a:endParaRPr lang="en-US" sz="1400" dirty="0"/>
+          </a:p>
+          <a:p>
+            <a:pPr indent="0" marL="0">
+              <a:spcAft>
+                <a:spcPts val="100"/>
+              </a:spcAft>
+              <a:buNone/>
+            </a:pPr>
             <a:endParaRPr lang="en-US" sz="1400" dirty="0"/>
           </a:p>
           <a:p>
@@ -12617,7 +12477,7 @@
                 <a:ea typeface="Calibri" pitchFamily="34" charset="-122"/>
                 <a:cs typeface="Calibri" pitchFamily="34" charset="-120"/>
               </a:rPr>
-              <a:t>• 後改填為 Doxology</a:t>
+              <a:t>■ 傳播</a:t>
             </a:r>
             <a:endParaRPr lang="en-US" sz="1400" dirty="0"/>
           </a:p>
@@ -12637,56 +12497,7 @@
                 <a:ea typeface="Calibri" pitchFamily="34" charset="-122"/>
                 <a:cs typeface="Calibri" pitchFamily="34" charset="-120"/>
               </a:rPr>
-              <a:t>• 英語「Old 100th」旋律源自此</a:t>
-            </a:r>
-            <a:endParaRPr lang="en-US" sz="1400" dirty="0"/>
-          </a:p>
-          <a:p>
-            <a:pPr indent="0" marL="0">
-              <a:spcAft>
-                <a:spcPts val="100"/>
-              </a:spcAft>
-              <a:buNone/>
-            </a:pPr>
-            <a:endParaRPr lang="en-US" sz="1400" dirty="0"/>
-          </a:p>
-          <a:p>
-            <a:pPr indent="0" marL="0">
-              <a:spcAft>
-                <a:spcPts val="100"/>
-              </a:spcAft>
-              <a:buNone/>
-            </a:pPr>
-            <a:r>
-              <a:rPr lang="en-US" sz="1400" dirty="0">
-                <a:solidFill>
-                  <a:srgbClr val="1A2240"/>
-                </a:solidFill>
-                <a:latin typeface="Calibri" pitchFamily="34" charset="0"/>
-                <a:ea typeface="Calibri" pitchFamily="34" charset="-122"/>
-                <a:cs typeface="Calibri" pitchFamily="34" charset="-120"/>
-              </a:rPr>
-              <a:t>■ 傳播</a:t>
-            </a:r>
-            <a:endParaRPr lang="en-US" sz="1400" dirty="0"/>
-          </a:p>
-          <a:p>
-            <a:pPr indent="0" marL="0">
-              <a:spcAft>
-                <a:spcPts val="100"/>
-              </a:spcAft>
-              <a:buNone/>
-            </a:pPr>
-            <a:r>
-              <a:rPr lang="en-US" sz="1400" dirty="0">
-                <a:solidFill>
-                  <a:srgbClr val="1A2240"/>
-                </a:solidFill>
-                <a:latin typeface="Calibri" pitchFamily="34" charset="0"/>
-                <a:ea typeface="Calibri" pitchFamily="34" charset="-122"/>
-                <a:cs typeface="Calibri" pitchFamily="34" charset="-120"/>
-              </a:rPr>
-              <a:t>• 翻譯 20+ 種語言 · 法語圈、荷、蘇格蘭</a:t>
+              <a:t>• 譯 20+ 語 · 法語圈、荷、蘇格蘭</a:t>
             </a:r>
             <a:endParaRPr lang="en-US" sz="1400" dirty="0"/>
           </a:p>
@@ -13825,7 +13636,7 @@
                 <a:ea typeface="Calibri" pitchFamily="34" charset="-122"/>
                 <a:cs typeface="Calibri" pitchFamily="34" charset="-120"/>
               </a:rPr>
-              <a:t>• 討論：彌撒音樂是否過度世俗化？</a:t>
+              <a:t>• 討論彌撒音樂世俗化問題</a:t>
             </a:r>
             <a:endParaRPr lang="en-US" sz="1400" dirty="0"/>
           </a:p>
@@ -13905,6 +13716,15 @@
               </a:spcAft>
               <a:buNone/>
             </a:pPr>
+            <a:endParaRPr lang="en-US" sz="1400" dirty="0"/>
+          </a:p>
+          <a:p>
+            <a:pPr indent="0" marL="0">
+              <a:spcAft>
+                <a:spcPts val="100"/>
+              </a:spcAft>
+              <a:buNone/>
+            </a:pPr>
             <a:r>
               <a:rPr lang="en-US" sz="1400" dirty="0">
                 <a:solidFill>
@@ -13914,17 +13734,8 @@
                 <a:ea typeface="Calibri" pitchFamily="34" charset="-122"/>
                 <a:cs typeface="Calibri" pitchFamily="34" charset="-120"/>
               </a:rPr>
-              <a:t>• 激進派主張驅逐所有複音</a:t>
-            </a:r>
-            <a:endParaRPr lang="en-US" sz="1400" dirty="0"/>
-          </a:p>
-          <a:p>
-            <a:pPr indent="0" marL="0">
-              <a:spcAft>
-                <a:spcPts val="100"/>
-              </a:spcAft>
-              <a:buNone/>
-            </a:pPr>
+              <a:t>最終決議 (1562)</a:t>
+            </a:r>
             <a:endParaRPr lang="en-US" sz="1400" dirty="0"/>
           </a:p>
           <a:p>
@@ -13943,7 +13754,7 @@
                 <a:ea typeface="Calibri" pitchFamily="34" charset="-122"/>
                 <a:cs typeface="Calibri" pitchFamily="34" charset="-120"/>
               </a:rPr>
-              <a:t>最終決議 (1562)</a:t>
+              <a:t>• 允許複音 · 文字須聽懂</a:t>
             </a:r>
             <a:endParaRPr lang="en-US" sz="1400" dirty="0"/>
           </a:p>
@@ -13963,47 +13774,7 @@
                 <a:ea typeface="Calibri" pitchFamily="34" charset="-122"/>
                 <a:cs typeface="Calibri" pitchFamily="34" charset="-120"/>
               </a:rPr>
-              <a:t>• 允許複音 · 文字必須聽懂</a:t>
-            </a:r>
-            <a:endParaRPr lang="en-US" sz="1400" dirty="0"/>
-          </a:p>
-          <a:p>
-            <a:pPr indent="0" marL="0">
-              <a:spcAft>
-                <a:spcPts val="100"/>
-              </a:spcAft>
-              <a:buNone/>
-            </a:pPr>
-            <a:r>
-              <a:rPr lang="en-US" sz="1400" dirty="0">
-                <a:solidFill>
-                  <a:srgbClr val="1A2240"/>
-                </a:solidFill>
-                <a:latin typeface="Calibri" pitchFamily="34" charset="0"/>
-                <a:ea typeface="Calibri" pitchFamily="34" charset="-122"/>
-                <a:cs typeface="Calibri" pitchFamily="34" charset="-120"/>
-              </a:rPr>
-              <a:t>• 禁止「猥褻」旋律</a:t>
-            </a:r>
-            <a:endParaRPr lang="en-US" sz="1400" dirty="0"/>
-          </a:p>
-          <a:p>
-            <a:pPr indent="0" marL="0">
-              <a:spcAft>
-                <a:spcPts val="100"/>
-              </a:spcAft>
-              <a:buNone/>
-            </a:pPr>
-            <a:r>
-              <a:rPr lang="en-US" sz="1400" dirty="0">
-                <a:solidFill>
-                  <a:srgbClr val="1A2240"/>
-                </a:solidFill>
-                <a:latin typeface="Calibri" pitchFamily="34" charset="0"/>
-                <a:ea typeface="Calibri" pitchFamily="34" charset="-122"/>
-                <a:cs typeface="Calibri" pitchFamily="34" charset="-120"/>
-              </a:rPr>
-              <a:t>• 未指定特定風格</a:t>
+              <a:t>• 禁「猥褻」旋律 · 未指定風格</a:t>
             </a:r>
             <a:endParaRPr lang="en-US" sz="1400" dirty="0"/>
           </a:p>
@@ -14262,8 +14033,17 @@
                 <a:ea typeface="Calibri" pitchFamily="34" charset="-122"/>
                 <a:cs typeface="Calibri" pitchFamily="34" charset="-120"/>
               </a:rPr>
-              <a:t>• 此彌撒 1562–3 年創作</a:t>
-            </a:r>
+              <a:t>• 1562–3 創作 · 風格已是改革共識</a:t>
+            </a:r>
+            <a:endParaRPr lang="en-US" sz="1400" dirty="0"/>
+          </a:p>
+          <a:p>
+            <a:pPr indent="0" marL="0">
+              <a:spcAft>
+                <a:spcPts val="100"/>
+              </a:spcAft>
+              <a:buNone/>
+            </a:pPr>
             <a:endParaRPr lang="en-US" sz="1400" dirty="0"/>
           </a:p>
           <a:p>
@@ -14282,17 +14062,8 @@
                 <a:ea typeface="Calibri" pitchFamily="34" charset="-122"/>
                 <a:cs typeface="Calibri" pitchFamily="34" charset="-120"/>
               </a:rPr>
-              <a:t>• 清晰風格已是改革共識</a:t>
-            </a:r>
-            <a:endParaRPr lang="en-US" sz="1400" dirty="0"/>
-          </a:p>
-          <a:p>
-            <a:pPr indent="0" marL="0">
-              <a:spcAft>
-                <a:spcPts val="100"/>
-              </a:spcAft>
-              <a:buNone/>
-            </a:pPr>
+              <a:t>■ 象徵意義</a:t>
+            </a:r>
             <a:endParaRPr lang="en-US" sz="1400" dirty="0"/>
           </a:p>
           <a:p>
@@ -14311,7 +14082,7 @@
                 <a:ea typeface="Calibri" pitchFamily="34" charset="-122"/>
                 <a:cs typeface="Calibri" pitchFamily="34" charset="-120"/>
               </a:rPr>
-              <a:t>■ 象徵意義</a:t>
+              <a:t>• 19 世紀視為「天主教音樂救主」</a:t>
             </a:r>
             <a:endParaRPr lang="en-US" sz="1400" dirty="0"/>
           </a:p>
@@ -14331,8 +14102,17 @@
                 <a:ea typeface="Calibri" pitchFamily="34" charset="-122"/>
                 <a:cs typeface="Calibri" pitchFamily="34" charset="-120"/>
               </a:rPr>
-              <a:t>• 19 世紀視為「天主教音樂的救主」</a:t>
-            </a:r>
+              <a:t>• Pfitzner 1917《Palestrina》歌劇</a:t>
+            </a:r>
+            <a:endParaRPr lang="en-US" sz="1400" dirty="0"/>
+          </a:p>
+          <a:p>
+            <a:pPr indent="0" marL="0">
+              <a:spcAft>
+                <a:spcPts val="100"/>
+              </a:spcAft>
+              <a:buNone/>
+            </a:pPr>
             <a:endParaRPr lang="en-US" sz="1400" dirty="0"/>
           </a:p>
           <a:p>
@@ -14351,17 +14131,8 @@
                 <a:ea typeface="Calibri" pitchFamily="34" charset="-122"/>
                 <a:cs typeface="Calibri" pitchFamily="34" charset="-120"/>
               </a:rPr>
-              <a:t>• Pfitzner 1917 歌劇《Palestrina》</a:t>
-            </a:r>
-            <a:endParaRPr lang="en-US" sz="1400" dirty="0"/>
-          </a:p>
-          <a:p>
-            <a:pPr indent="0" marL="0">
-              <a:spcAft>
-                <a:spcPts val="100"/>
-              </a:spcAft>
-              <a:buNone/>
-            </a:pPr>
+              <a:t>■ 後續</a:t>
+            </a:r>
             <a:endParaRPr lang="en-US" sz="1400" dirty="0"/>
           </a:p>
           <a:p>
@@ -14380,47 +14151,7 @@
                 <a:ea typeface="Calibri" pitchFamily="34" charset="-122"/>
                 <a:cs typeface="Calibri" pitchFamily="34" charset="-120"/>
               </a:rPr>
-              <a:t>■ 後續</a:t>
-            </a:r>
-            <a:endParaRPr lang="en-US" sz="1400" dirty="0"/>
-          </a:p>
-          <a:p>
-            <a:pPr indent="0" marL="0">
-              <a:spcAft>
-                <a:spcPts val="100"/>
-              </a:spcAft>
-              <a:buNone/>
-            </a:pPr>
-            <a:r>
-              <a:rPr lang="en-US" sz="1400" dirty="0">
-                <a:solidFill>
-                  <a:srgbClr val="1A2240"/>
-                </a:solidFill>
-                <a:latin typeface="Calibri" pitchFamily="34" charset="0"/>
-                <a:ea typeface="Calibri" pitchFamily="34" charset="-122"/>
-                <a:cs typeface="Calibri" pitchFamily="34" charset="-120"/>
-              </a:rPr>
-              <a:t>• Palestrina 對位成標準教材</a:t>
-            </a:r>
-            <a:endParaRPr lang="en-US" sz="1400" dirty="0"/>
-          </a:p>
-          <a:p>
-            <a:pPr indent="0" marL="0">
-              <a:spcAft>
-                <a:spcPts val="100"/>
-              </a:spcAft>
-              <a:buNone/>
-            </a:pPr>
-            <a:r>
-              <a:rPr lang="en-US" sz="1400" dirty="0">
-                <a:solidFill>
-                  <a:srgbClr val="1A2240"/>
-                </a:solidFill>
-                <a:latin typeface="Calibri" pitchFamily="34" charset="0"/>
-                <a:ea typeface="Calibri" pitchFamily="34" charset="-122"/>
-                <a:cs typeface="Calibri" pitchFamily="34" charset="-120"/>
-              </a:rPr>
-              <a:t>• Fux《Gradus ad Parnassum》(1725)</a:t>
+              <a:t>• 對位成標準教材 · Fux (1725)</a:t>
             </a:r>
             <a:endParaRPr lang="en-US" sz="1400" dirty="0"/>
           </a:p>
